--- a/native/HDDS_환경분석보고서_V1.1.pptx
+++ b/native/HDDS_환경분석보고서_V1.1.pptx
@@ -3141,29 +3141,73 @@
       </p:sp>
       <p:sp>
         <p:nvSpPr>
-          <p:cNvPr id="3" name="TextBox 2"/>
-          <p:cNvSpPr txBox="1"/>
-          <p:nvPr/>
-        </p:nvSpPr>
-        <p:spPr>
-          <a:xfrm>
-            <a:off x="975335" y="2194560"/>
-            <a:ext cx="10241023" cy="822960"/>
-          </a:xfrm>
-          <a:prstGeom prst="rect">
-            <a:avLst/>
-          </a:prstGeom>
-          <a:noFill/>
-        </p:spPr>
-        <p:txBody>
-          <a:bodyPr wrap="square" lIns="36000" rIns="36000" tIns="18000" bIns="18000">
-            <a:spAutoFit/>
-          </a:bodyPr>
-          <a:lstStyle/>
-          <a:p>
-            <a:pPr algn="l"/>
-            <a:r>
-              <a:rPr sz="3400" b="1">
+          <p:cNvPr id="3" name="Rectangle 2"/>
+          <p:cNvSpPr/>
+          <p:nvPr/>
+        </p:nvSpPr>
+        <p:spPr>
+          <a:xfrm>
+            <a:off x="646159" y="720090"/>
+            <a:ext cx="731501" cy="34290"/>
+          </a:xfrm>
+          <a:prstGeom prst="rect">
+            <a:avLst/>
+          </a:prstGeom>
+          <a:solidFill>
+            <a:srgbClr val="FFFFFF"/>
+          </a:solidFill>
+          <a:ln>
+            <a:noFill/>
+          </a:ln>
+          <a:effectLst/>
+        </p:spPr>
+        <p:style>
+          <a:lnRef idx="1">
+            <a:schemeClr val="accent1"/>
+          </a:lnRef>
+          <a:fillRef idx="3">
+            <a:schemeClr val="accent1"/>
+          </a:fillRef>
+          <a:effectRef idx="2">
+            <a:schemeClr val="accent1"/>
+          </a:effectRef>
+          <a:fontRef idx="minor">
+            <a:schemeClr val="lt1"/>
+          </a:fontRef>
+        </p:style>
+        <p:txBody>
+          <a:bodyPr rtlCol="0" anchor="ctr"/>
+          <a:lstStyle/>
+          <a:p>
+            <a:pPr algn="ctr"/>
+          </a:p>
+        </p:txBody>
+      </p:sp>
+      <p:sp>
+        <p:nvSpPr>
+          <p:cNvPr id="4" name="TextBox 3"/>
+          <p:cNvSpPr txBox="1"/>
+          <p:nvPr/>
+        </p:nvSpPr>
+        <p:spPr>
+          <a:xfrm>
+            <a:off x="609584" y="836676"/>
+            <a:ext cx="10972525" cy="960120"/>
+          </a:xfrm>
+          <a:prstGeom prst="rect">
+            <a:avLst/>
+          </a:prstGeom>
+          <a:noFill/>
+        </p:spPr>
+        <p:txBody>
+          <a:bodyPr wrap="square" lIns="36000" rIns="36000" tIns="18000" bIns="18000">
+            <a:spAutoFit/>
+          </a:bodyPr>
+          <a:lstStyle/>
+          <a:p>
+            <a:pPr algn="l"/>
+            <a:r>
+              <a:rPr sz="3200" b="1">
                 <a:solidFill>
                   <a:srgbClr val="FFFFFF"/>
                 </a:solidFill>
@@ -3176,31 +3220,31 @@
       </p:sp>
       <p:sp>
         <p:nvSpPr>
-          <p:cNvPr id="4" name="TextBox 3"/>
-          <p:cNvSpPr txBox="1"/>
-          <p:nvPr/>
-        </p:nvSpPr>
-        <p:spPr>
-          <a:xfrm>
-            <a:off x="975335" y="3086100"/>
-            <a:ext cx="10241023" cy="411480"/>
-          </a:xfrm>
-          <a:prstGeom prst="rect">
-            <a:avLst/>
-          </a:prstGeom>
-          <a:noFill/>
-        </p:spPr>
-        <p:txBody>
-          <a:bodyPr wrap="square" lIns="36000" rIns="36000" tIns="18000" bIns="18000">
-            <a:spAutoFit/>
-          </a:bodyPr>
-          <a:lstStyle/>
-          <a:p>
-            <a:pPr algn="l"/>
-            <a:r>
-              <a:rPr sz="1500" b="0">
-                <a:solidFill>
-                  <a:srgbClr val="C8C8C8"/>
+          <p:cNvPr id="5" name="TextBox 4"/>
+          <p:cNvSpPr txBox="1"/>
+          <p:nvPr/>
+        </p:nvSpPr>
+        <p:spPr>
+          <a:xfrm>
+            <a:off x="646159" y="1714500"/>
+            <a:ext cx="10972525" cy="411480"/>
+          </a:xfrm>
+          <a:prstGeom prst="rect">
+            <a:avLst/>
+          </a:prstGeom>
+          <a:noFill/>
+        </p:spPr>
+        <p:txBody>
+          <a:bodyPr wrap="square" lIns="36000" rIns="36000" tIns="18000" bIns="18000">
+            <a:spAutoFit/>
+          </a:bodyPr>
+          <a:lstStyle/>
+          <a:p>
+            <a:pPr algn="l"/>
+            <a:r>
+              <a:rPr sz="1400" b="0">
+                <a:solidFill>
+                  <a:srgbClr val="B0B0B0"/>
                 </a:solidFill>
                 <a:latin typeface="Pretendard"/>
               </a:rPr>
@@ -3211,31 +3255,31 @@
       </p:sp>
       <p:sp>
         <p:nvSpPr>
-          <p:cNvPr id="5" name="TextBox 4"/>
-          <p:cNvSpPr txBox="1"/>
-          <p:nvPr/>
-        </p:nvSpPr>
-        <p:spPr>
-          <a:xfrm>
-            <a:off x="975335" y="4251960"/>
-            <a:ext cx="10241023" cy="1371600"/>
-          </a:xfrm>
-          <a:prstGeom prst="rect">
-            <a:avLst/>
-          </a:prstGeom>
-          <a:noFill/>
-        </p:spPr>
-        <p:txBody>
-          <a:bodyPr wrap="square" lIns="36000" rIns="36000" tIns="18000" bIns="18000">
-            <a:spAutoFit/>
-          </a:bodyPr>
-          <a:lstStyle/>
-          <a:p>
-            <a:pPr algn="l"/>
-            <a:r>
-              <a:rPr sz="1100" b="0">
-                <a:solidFill>
-                  <a:srgbClr val="A8A8A8"/>
+          <p:cNvPr id="6" name="TextBox 5"/>
+          <p:cNvSpPr txBox="1"/>
+          <p:nvPr/>
+        </p:nvSpPr>
+        <p:spPr>
+          <a:xfrm>
+            <a:off x="646159" y="4800600"/>
+            <a:ext cx="5486262" cy="1234440"/>
+          </a:xfrm>
+          <a:prstGeom prst="rect">
+            <a:avLst/>
+          </a:prstGeom>
+          <a:noFill/>
+        </p:spPr>
+        <p:txBody>
+          <a:bodyPr wrap="square" lIns="36000" rIns="36000" tIns="18000" bIns="18000">
+            <a:spAutoFit/>
+          </a:bodyPr>
+          <a:lstStyle/>
+          <a:p>
+            <a:pPr algn="l"/>
+            <a:r>
+              <a:rPr sz="1050" b="0">
+                <a:solidFill>
+                  <a:srgbClr val="A0A0A0"/>
                 </a:solidFill>
                 <a:latin typeface="Pretendard"/>
               </a:rPr>
@@ -3245,9 +3289,9 @@
           <a:p>
             <a:pPr algn="l"/>
             <a:r>
-              <a:rPr sz="1100" b="0">
-                <a:solidFill>
-                  <a:srgbClr val="A8A8A8"/>
+              <a:rPr sz="1050" b="0">
+                <a:solidFill>
+                  <a:srgbClr val="A0A0A0"/>
                 </a:solidFill>
                 <a:latin typeface="Pretendard"/>
               </a:rPr>
@@ -3257,21 +3301,9 @@
           <a:p>
             <a:pPr algn="l"/>
             <a:r>
-              <a:rPr sz="1100" b="0">
-                <a:solidFill>
-                  <a:srgbClr val="A8A8A8"/>
-                </a:solidFill>
-                <a:latin typeface="Pretendard"/>
-              </a:rPr>
-              <a:t>작성일   2026-08-10</a:t>
-            </a:r>
-          </a:p>
-          <a:p>
-            <a:pPr algn="l"/>
-            <a:r>
-              <a:rPr sz="1100" b="0">
-                <a:solidFill>
-                  <a:srgbClr val="A8A8A8"/>
+              <a:rPr sz="1050" b="0">
+                <a:solidFill>
+                  <a:srgbClr val="A0A0A0"/>
                 </a:solidFill>
                 <a:latin typeface="Pretendard"/>
               </a:rPr>
@@ -3281,9 +3313,9 @@
           <a:p>
             <a:pPr algn="l"/>
             <a:r>
-              <a:rPr sz="1100" b="0">
-                <a:solidFill>
-                  <a:srgbClr val="A8A8A8"/>
+              <a:rPr sz="1050" b="0">
+                <a:solidFill>
+                  <a:srgbClr val="A0A0A0"/>
                 </a:solidFill>
                 <a:latin typeface="Pretendard"/>
               </a:rPr>
@@ -3294,14 +3326,49 @@
       </p:sp>
       <p:sp>
         <p:nvSpPr>
-          <p:cNvPr id="6" name="TextBox 5"/>
-          <p:cNvSpPr txBox="1"/>
-          <p:nvPr/>
-        </p:nvSpPr>
-        <p:spPr>
-          <a:xfrm>
-            <a:off x="975335" y="6172200"/>
-            <a:ext cx="10241023" cy="342900"/>
+          <p:cNvPr id="7" name="TextBox 6"/>
+          <p:cNvSpPr txBox="1"/>
+          <p:nvPr/>
+        </p:nvSpPr>
+        <p:spPr>
+          <a:xfrm>
+            <a:off x="3401482" y="5212080"/>
+            <a:ext cx="7315017" cy="411480"/>
+          </a:xfrm>
+          <a:prstGeom prst="rect">
+            <a:avLst/>
+          </a:prstGeom>
+          <a:noFill/>
+        </p:spPr>
+        <p:txBody>
+          <a:bodyPr wrap="square" lIns="36000" rIns="36000" tIns="18000" bIns="18000">
+            <a:spAutoFit/>
+          </a:bodyPr>
+          <a:lstStyle/>
+          <a:p>
+            <a:pPr algn="r"/>
+            <a:r>
+              <a:rPr sz="1300" b="0">
+                <a:solidFill>
+                  <a:srgbClr val="D8D8D8"/>
+                </a:solidFill>
+                <a:latin typeface="Pretendard"/>
+              </a:rPr>
+              <a:t>2026-08-10</a:t>
+            </a:r>
+          </a:p>
+        </p:txBody>
+      </p:sp>
+      <p:sp>
+        <p:nvSpPr>
+          <p:cNvPr id="8" name="TextBox 7"/>
+          <p:cNvSpPr txBox="1"/>
+          <p:nvPr/>
+        </p:nvSpPr>
+        <p:spPr>
+          <a:xfrm>
+            <a:off x="646159" y="6309360"/>
+            <a:ext cx="3657508" cy="342900"/>
           </a:xfrm>
           <a:prstGeom prst="rect">
             <a:avLst/>
@@ -3353,23 +3420,58 @@
         </p:nvSpPr>
         <p:spPr>
           <a:xfrm>
-            <a:off x="365750" y="274320"/>
-            <a:ext cx="7315017" cy="411480"/>
-          </a:xfrm>
-          <a:prstGeom prst="rect">
-            <a:avLst/>
-          </a:prstGeom>
-          <a:noFill/>
-        </p:spPr>
-        <p:txBody>
-          <a:bodyPr wrap="square" lIns="36000" rIns="36000" tIns="18000" bIns="18000">
-            <a:spAutoFit/>
-          </a:bodyPr>
-          <a:lstStyle/>
-          <a:p>
-            <a:pPr algn="l"/>
-            <a:r>
-              <a:rPr sz="1800" b="1">
+            <a:off x="487667" y="137160"/>
+            <a:ext cx="7315017" cy="274320"/>
+          </a:xfrm>
+          <a:prstGeom prst="rect">
+            <a:avLst/>
+          </a:prstGeom>
+          <a:noFill/>
+        </p:spPr>
+        <p:txBody>
+          <a:bodyPr wrap="square" lIns="36000" rIns="36000" tIns="18000" bIns="18000">
+            <a:spAutoFit/>
+          </a:bodyPr>
+          <a:lstStyle/>
+          <a:p>
+            <a:pPr algn="l"/>
+            <a:r>
+              <a:rPr sz="900" b="0">
+                <a:solidFill>
+                  <a:srgbClr val="767676"/>
+                </a:solidFill>
+                <a:latin typeface="Pretendard"/>
+              </a:rPr>
+              <a:t>문서 정보</a:t>
+            </a:r>
+          </a:p>
+        </p:txBody>
+      </p:sp>
+      <p:sp>
+        <p:nvSpPr>
+          <p:cNvPr id="3" name="TextBox 2"/>
+          <p:cNvSpPr txBox="1"/>
+          <p:nvPr/>
+        </p:nvSpPr>
+        <p:spPr>
+          <a:xfrm>
+            <a:off x="487667" y="548640"/>
+            <a:ext cx="7315017" cy="480060"/>
+          </a:xfrm>
+          <a:prstGeom prst="rect">
+            <a:avLst/>
+          </a:prstGeom>
+          <a:noFill/>
+        </p:spPr>
+        <p:txBody>
+          <a:bodyPr wrap="square" lIns="36000" rIns="36000" tIns="18000" bIns="18000">
+            <a:spAutoFit/>
+          </a:bodyPr>
+          <a:lstStyle/>
+          <a:p>
+            <a:pPr algn="l"/>
+            <a:r>
+              <a:rPr sz="2400" b="1">
                 <a:solidFill>
                   <a:srgbClr val="1A1A1A"/>
                 </a:solidFill>
@@ -3382,14 +3484,14 @@
       </p:sp>
       <p:sp>
         <p:nvSpPr>
-          <p:cNvPr id="3" name="Rectangle 2"/>
+          <p:cNvPr id="4" name="Rectangle 3"/>
           <p:cNvSpPr/>
           <p:nvPr/>
         </p:nvSpPr>
         <p:spPr>
           <a:xfrm>
-            <a:off x="365750" y="822960"/>
-            <a:ext cx="975335" cy="342900"/>
+            <a:off x="487667" y="1371600"/>
+            <a:ext cx="975335" cy="377190"/>
           </a:xfrm>
           <a:prstGeom prst="rect">
             <a:avLst/>
@@ -3428,14 +3530,14 @@
       </p:sp>
       <p:sp>
         <p:nvSpPr>
-          <p:cNvPr id="4" name="TextBox 3"/>
-          <p:cNvSpPr txBox="1"/>
-          <p:nvPr/>
-        </p:nvSpPr>
-        <p:spPr>
-          <a:xfrm>
-            <a:off x="365750" y="864108"/>
-            <a:ext cx="975335" cy="274320"/>
+          <p:cNvPr id="5" name="TextBox 4"/>
+          <p:cNvSpPr txBox="1"/>
+          <p:nvPr/>
+        </p:nvSpPr>
+        <p:spPr>
+          <a:xfrm>
+            <a:off x="487667" y="1426464"/>
+            <a:ext cx="975335" cy="301752"/>
           </a:xfrm>
           <a:prstGeom prst="rect">
             <a:avLst/>
@@ -3463,14 +3565,14 @@
       </p:sp>
       <p:sp>
         <p:nvSpPr>
-          <p:cNvPr id="5" name="Rectangle 4"/>
+          <p:cNvPr id="6" name="Rectangle 5"/>
           <p:cNvSpPr/>
           <p:nvPr/>
         </p:nvSpPr>
         <p:spPr>
           <a:xfrm>
-            <a:off x="1341086" y="822960"/>
-            <a:ext cx="1463003" cy="342900"/>
+            <a:off x="1463003" y="1371600"/>
+            <a:ext cx="1463003" cy="377190"/>
           </a:xfrm>
           <a:prstGeom prst="rect">
             <a:avLst/>
@@ -3509,14 +3611,14 @@
       </p:sp>
       <p:sp>
         <p:nvSpPr>
-          <p:cNvPr id="6" name="TextBox 5"/>
-          <p:cNvSpPr txBox="1"/>
-          <p:nvPr/>
-        </p:nvSpPr>
-        <p:spPr>
-          <a:xfrm>
-            <a:off x="1341086" y="864108"/>
-            <a:ext cx="1463003" cy="274320"/>
+          <p:cNvPr id="7" name="TextBox 6"/>
+          <p:cNvSpPr txBox="1"/>
+          <p:nvPr/>
+        </p:nvSpPr>
+        <p:spPr>
+          <a:xfrm>
+            <a:off x="1463003" y="1426464"/>
+            <a:ext cx="1463003" cy="301752"/>
           </a:xfrm>
           <a:prstGeom prst="rect">
             <a:avLst/>
@@ -3544,14 +3646,14 @@
       </p:sp>
       <p:sp>
         <p:nvSpPr>
-          <p:cNvPr id="7" name="Rectangle 6"/>
+          <p:cNvPr id="8" name="Rectangle 7"/>
           <p:cNvSpPr/>
           <p:nvPr/>
         </p:nvSpPr>
         <p:spPr>
           <a:xfrm>
-            <a:off x="2804089" y="822960"/>
-            <a:ext cx="7315017" cy="342900"/>
+            <a:off x="2926006" y="1371600"/>
+            <a:ext cx="7315017" cy="377190"/>
           </a:xfrm>
           <a:prstGeom prst="rect">
             <a:avLst/>
@@ -3590,14 +3692,14 @@
       </p:sp>
       <p:sp>
         <p:nvSpPr>
-          <p:cNvPr id="8" name="TextBox 7"/>
-          <p:cNvSpPr txBox="1"/>
-          <p:nvPr/>
-        </p:nvSpPr>
-        <p:spPr>
-          <a:xfrm>
-            <a:off x="2804089" y="864108"/>
-            <a:ext cx="7315017" cy="274320"/>
+          <p:cNvPr id="9" name="TextBox 8"/>
+          <p:cNvSpPr txBox="1"/>
+          <p:nvPr/>
+        </p:nvSpPr>
+        <p:spPr>
+          <a:xfrm>
+            <a:off x="2926006" y="1426464"/>
+            <a:ext cx="7315017" cy="301752"/>
           </a:xfrm>
           <a:prstGeom prst="rect">
             <a:avLst/>
@@ -3625,14 +3727,14 @@
       </p:sp>
       <p:sp>
         <p:nvSpPr>
-          <p:cNvPr id="9" name="Rectangle 8"/>
+          <p:cNvPr id="10" name="Rectangle 9"/>
           <p:cNvSpPr/>
           <p:nvPr/>
         </p:nvSpPr>
         <p:spPr>
           <a:xfrm>
-            <a:off x="10119106" y="822960"/>
-            <a:ext cx="1706837" cy="342900"/>
+            <a:off x="10241023" y="1371600"/>
+            <a:ext cx="1706837" cy="377190"/>
           </a:xfrm>
           <a:prstGeom prst="rect">
             <a:avLst/>
@@ -3671,14 +3773,14 @@
       </p:sp>
       <p:sp>
         <p:nvSpPr>
-          <p:cNvPr id="10" name="TextBox 9"/>
-          <p:cNvSpPr txBox="1"/>
-          <p:nvPr/>
-        </p:nvSpPr>
-        <p:spPr>
-          <a:xfrm>
-            <a:off x="10119106" y="864108"/>
-            <a:ext cx="1706837" cy="274320"/>
+          <p:cNvPr id="11" name="TextBox 10"/>
+          <p:cNvSpPr txBox="1"/>
+          <p:nvPr/>
+        </p:nvSpPr>
+        <p:spPr>
+          <a:xfrm>
+            <a:off x="10241023" y="1426464"/>
+            <a:ext cx="1706837" cy="301752"/>
           </a:xfrm>
           <a:prstGeom prst="rect">
             <a:avLst/>
@@ -3706,13 +3808,13 @@
       </p:sp>
       <p:sp>
         <p:nvSpPr>
-          <p:cNvPr id="11" name="Rectangle 10"/>
+          <p:cNvPr id="12" name="Rectangle 11"/>
           <p:cNvSpPr/>
           <p:nvPr/>
         </p:nvSpPr>
         <p:spPr>
           <a:xfrm>
-            <a:off x="365750" y="1165860"/>
+            <a:off x="487667" y="1748790"/>
             <a:ext cx="975335" cy="411480"/>
           </a:xfrm>
           <a:prstGeom prst="rect">
@@ -3750,13 +3852,13 @@
       </p:sp>
       <p:sp>
         <p:nvSpPr>
-          <p:cNvPr id="12" name="TextBox 11"/>
-          <p:cNvSpPr txBox="1"/>
-          <p:nvPr/>
-        </p:nvSpPr>
-        <p:spPr>
-          <a:xfrm>
-            <a:off x="365750" y="1200150"/>
+          <p:cNvPr id="13" name="TextBox 12"/>
+          <p:cNvSpPr txBox="1"/>
+          <p:nvPr/>
+        </p:nvSpPr>
+        <p:spPr>
+          <a:xfrm>
+            <a:off x="487667" y="1783080"/>
             <a:ext cx="975335" cy="370332"/>
           </a:xfrm>
           <a:prstGeom prst="rect">
@@ -3785,13 +3887,13 @@
       </p:sp>
       <p:sp>
         <p:nvSpPr>
-          <p:cNvPr id="13" name="Rectangle 12"/>
+          <p:cNvPr id="14" name="Rectangle 13"/>
           <p:cNvSpPr/>
           <p:nvPr/>
         </p:nvSpPr>
         <p:spPr>
           <a:xfrm>
-            <a:off x="1341086" y="1165860"/>
+            <a:off x="1463003" y="1748790"/>
             <a:ext cx="1463003" cy="411480"/>
           </a:xfrm>
           <a:prstGeom prst="rect">
@@ -3829,13 +3931,13 @@
       </p:sp>
       <p:sp>
         <p:nvSpPr>
-          <p:cNvPr id="14" name="TextBox 13"/>
-          <p:cNvSpPr txBox="1"/>
-          <p:nvPr/>
-        </p:nvSpPr>
-        <p:spPr>
-          <a:xfrm>
-            <a:off x="1341086" y="1200150"/>
+          <p:cNvPr id="15" name="TextBox 14"/>
+          <p:cNvSpPr txBox="1"/>
+          <p:nvPr/>
+        </p:nvSpPr>
+        <p:spPr>
+          <a:xfrm>
+            <a:off x="1463003" y="1783080"/>
             <a:ext cx="1463003" cy="370332"/>
           </a:xfrm>
           <a:prstGeom prst="rect">
@@ -3864,13 +3966,13 @@
       </p:sp>
       <p:sp>
         <p:nvSpPr>
-          <p:cNvPr id="15" name="Rectangle 14"/>
+          <p:cNvPr id="16" name="Rectangle 15"/>
           <p:cNvSpPr/>
           <p:nvPr/>
         </p:nvSpPr>
         <p:spPr>
           <a:xfrm>
-            <a:off x="2804089" y="1165860"/>
+            <a:off x="2926006" y="1748790"/>
             <a:ext cx="7315017" cy="411480"/>
           </a:xfrm>
           <a:prstGeom prst="rect">
@@ -3908,13 +4010,13 @@
       </p:sp>
       <p:sp>
         <p:nvSpPr>
-          <p:cNvPr id="16" name="TextBox 15"/>
-          <p:cNvSpPr txBox="1"/>
-          <p:nvPr/>
-        </p:nvSpPr>
-        <p:spPr>
-          <a:xfrm>
-            <a:off x="2804089" y="1200150"/>
+          <p:cNvPr id="17" name="TextBox 16"/>
+          <p:cNvSpPr txBox="1"/>
+          <p:nvPr/>
+        </p:nvSpPr>
+        <p:spPr>
+          <a:xfrm>
+            <a:off x="2926006" y="1783080"/>
             <a:ext cx="7315017" cy="370332"/>
           </a:xfrm>
           <a:prstGeom prst="rect">
@@ -3943,13 +4045,13 @@
       </p:sp>
       <p:sp>
         <p:nvSpPr>
-          <p:cNvPr id="17" name="Rectangle 16"/>
+          <p:cNvPr id="18" name="Rectangle 17"/>
           <p:cNvSpPr/>
           <p:nvPr/>
         </p:nvSpPr>
         <p:spPr>
           <a:xfrm>
-            <a:off x="10119106" y="1165860"/>
+            <a:off x="10241023" y="1748790"/>
             <a:ext cx="1706837" cy="411480"/>
           </a:xfrm>
           <a:prstGeom prst="rect">
@@ -3987,13 +4089,13 @@
       </p:sp>
       <p:sp>
         <p:nvSpPr>
-          <p:cNvPr id="18" name="TextBox 17"/>
-          <p:cNvSpPr txBox="1"/>
-          <p:nvPr/>
-        </p:nvSpPr>
-        <p:spPr>
-          <a:xfrm>
-            <a:off x="10119106" y="1200150"/>
+          <p:cNvPr id="19" name="TextBox 18"/>
+          <p:cNvSpPr txBox="1"/>
+          <p:nvPr/>
+        </p:nvSpPr>
+        <p:spPr>
+          <a:xfrm>
+            <a:off x="10241023" y="1783080"/>
             <a:ext cx="1706837" cy="370332"/>
           </a:xfrm>
           <a:prstGeom prst="rect">
@@ -4022,13 +4124,13 @@
       </p:sp>
       <p:sp>
         <p:nvSpPr>
-          <p:cNvPr id="19" name="Rectangle 18"/>
+          <p:cNvPr id="20" name="Rectangle 19"/>
           <p:cNvSpPr/>
           <p:nvPr/>
         </p:nvSpPr>
         <p:spPr>
           <a:xfrm>
-            <a:off x="365750" y="1577340"/>
+            <a:off x="487667" y="2160270"/>
             <a:ext cx="975335" cy="411480"/>
           </a:xfrm>
           <a:prstGeom prst="rect">
@@ -4066,13 +4168,13 @@
       </p:sp>
       <p:sp>
         <p:nvSpPr>
-          <p:cNvPr id="20" name="TextBox 19"/>
-          <p:cNvSpPr txBox="1"/>
-          <p:nvPr/>
-        </p:nvSpPr>
-        <p:spPr>
-          <a:xfrm>
-            <a:off x="365750" y="1611630"/>
+          <p:cNvPr id="21" name="TextBox 20"/>
+          <p:cNvSpPr txBox="1"/>
+          <p:nvPr/>
+        </p:nvSpPr>
+        <p:spPr>
+          <a:xfrm>
+            <a:off x="487667" y="2194560"/>
             <a:ext cx="975335" cy="370332"/>
           </a:xfrm>
           <a:prstGeom prst="rect">
@@ -4101,13 +4203,13 @@
       </p:sp>
       <p:sp>
         <p:nvSpPr>
-          <p:cNvPr id="21" name="Rectangle 20"/>
+          <p:cNvPr id="22" name="Rectangle 21"/>
           <p:cNvSpPr/>
           <p:nvPr/>
         </p:nvSpPr>
         <p:spPr>
           <a:xfrm>
-            <a:off x="1341086" y="1577340"/>
+            <a:off x="1463003" y="2160270"/>
             <a:ext cx="1463003" cy="411480"/>
           </a:xfrm>
           <a:prstGeom prst="rect">
@@ -4145,13 +4247,13 @@
       </p:sp>
       <p:sp>
         <p:nvSpPr>
-          <p:cNvPr id="22" name="TextBox 21"/>
-          <p:cNvSpPr txBox="1"/>
-          <p:nvPr/>
-        </p:nvSpPr>
-        <p:spPr>
-          <a:xfrm>
-            <a:off x="1341086" y="1611630"/>
+          <p:cNvPr id="23" name="TextBox 22"/>
+          <p:cNvSpPr txBox="1"/>
+          <p:nvPr/>
+        </p:nvSpPr>
+        <p:spPr>
+          <a:xfrm>
+            <a:off x="1463003" y="2194560"/>
             <a:ext cx="1463003" cy="370332"/>
           </a:xfrm>
           <a:prstGeom prst="rect">
@@ -4180,13 +4282,13 @@
       </p:sp>
       <p:sp>
         <p:nvSpPr>
-          <p:cNvPr id="23" name="Rectangle 22"/>
+          <p:cNvPr id="24" name="Rectangle 23"/>
           <p:cNvSpPr/>
           <p:nvPr/>
         </p:nvSpPr>
         <p:spPr>
           <a:xfrm>
-            <a:off x="2804089" y="1577340"/>
+            <a:off x="2926006" y="2160270"/>
             <a:ext cx="7315017" cy="411480"/>
           </a:xfrm>
           <a:prstGeom prst="rect">
@@ -4224,13 +4326,13 @@
       </p:sp>
       <p:sp>
         <p:nvSpPr>
-          <p:cNvPr id="24" name="TextBox 23"/>
-          <p:cNvSpPr txBox="1"/>
-          <p:nvPr/>
-        </p:nvSpPr>
-        <p:spPr>
-          <a:xfrm>
-            <a:off x="2804089" y="1611630"/>
+          <p:cNvPr id="25" name="TextBox 24"/>
+          <p:cNvSpPr txBox="1"/>
+          <p:nvPr/>
+        </p:nvSpPr>
+        <p:spPr>
+          <a:xfrm>
+            <a:off x="2926006" y="2194560"/>
             <a:ext cx="7315017" cy="370332"/>
           </a:xfrm>
           <a:prstGeom prst="rect">
@@ -4259,13 +4361,13 @@
       </p:sp>
       <p:sp>
         <p:nvSpPr>
-          <p:cNvPr id="25" name="Rectangle 24"/>
+          <p:cNvPr id="26" name="Rectangle 25"/>
           <p:cNvSpPr/>
           <p:nvPr/>
         </p:nvSpPr>
         <p:spPr>
           <a:xfrm>
-            <a:off x="10119106" y="1577340"/>
+            <a:off x="10241023" y="2160270"/>
             <a:ext cx="1706837" cy="411480"/>
           </a:xfrm>
           <a:prstGeom prst="rect">
@@ -4303,13 +4405,13 @@
       </p:sp>
       <p:sp>
         <p:nvSpPr>
-          <p:cNvPr id="26" name="TextBox 25"/>
-          <p:cNvSpPr txBox="1"/>
-          <p:nvPr/>
-        </p:nvSpPr>
-        <p:spPr>
-          <a:xfrm>
-            <a:off x="10119106" y="1611630"/>
+          <p:cNvPr id="27" name="TextBox 26"/>
+          <p:cNvSpPr txBox="1"/>
+          <p:nvPr/>
+        </p:nvSpPr>
+        <p:spPr>
+          <a:xfrm>
+            <a:off x="10241023" y="2194560"/>
             <a:ext cx="1706837" cy="370332"/>
           </a:xfrm>
           <a:prstGeom prst="rect">
